--- a/skills/beautiful-slides/charts/bar/example-editorial-magazine.pptx
+++ b/skills/beautiful-slides/charts/bar/example-editorial-magazine.pptx
@@ -3192,7 +3192,7 @@
             <a:r>
               <a:rPr sz="1200" b="0">
                 <a:solidFill>
-                  <a:srgbClr val="6F675F"/>
+                  <a:srgbClr val="181514"/>
                 </a:solidFill>
                 <a:latin typeface="IBM Plex Mono"/>
               </a:rPr>
@@ -3227,7 +3227,7 @@
             <a:r>
               <a:rPr sz="1200" b="0">
                 <a:solidFill>
-                  <a:srgbClr val="6F675F"/>
+                  <a:srgbClr val="181514"/>
                 </a:solidFill>
                 <a:latin typeface="IBM Plex Mono"/>
               </a:rPr>
@@ -3297,7 +3297,7 @@
             <a:r>
               <a:rPr sz="1200" b="0">
                 <a:solidFill>
-                  <a:srgbClr val="6F675F"/>
+                  <a:srgbClr val="181514"/>
                 </a:solidFill>
                 <a:latin typeface="IBM Plex Mono"/>
               </a:rPr>
@@ -3367,7 +3367,7 @@
             <a:r>
               <a:rPr sz="1200" b="0">
                 <a:solidFill>
-                  <a:srgbClr val="6F675F"/>
+                  <a:srgbClr val="181514"/>
                 </a:solidFill>
                 <a:latin typeface="IBM Plex Mono"/>
               </a:rPr>
@@ -3437,7 +3437,7 @@
             <a:r>
               <a:rPr sz="1200" b="0">
                 <a:solidFill>
-                  <a:srgbClr val="6F675F"/>
+                  <a:srgbClr val="181514"/>
                 </a:solidFill>
                 <a:latin typeface="IBM Plex Mono"/>
               </a:rPr>
@@ -3507,7 +3507,7 @@
             <a:r>
               <a:rPr sz="1200" b="0">
                 <a:solidFill>
-                  <a:srgbClr val="6F675F"/>
+                  <a:srgbClr val="181514"/>
                 </a:solidFill>
                 <a:latin typeface="IBM Plex Mono"/>
               </a:rPr>
@@ -3577,7 +3577,7 @@
             <a:r>
               <a:rPr sz="1200" b="0">
                 <a:solidFill>
-                  <a:srgbClr val="6F675F"/>
+                  <a:srgbClr val="181514"/>
                 </a:solidFill>
                 <a:latin typeface="IBM Plex Mono"/>
               </a:rPr>
@@ -3647,7 +3647,7 @@
             <a:r>
               <a:rPr sz="1200" b="0">
                 <a:solidFill>
-                  <a:srgbClr val="6F675F"/>
+                  <a:srgbClr val="181514"/>
                 </a:solidFill>
                 <a:latin typeface="IBM Plex Mono"/>
               </a:rPr>
